--- a/DLmidterm/report.pptx
+++ b/DLmidterm/report.pptx
@@ -228,7 +228,7 @@
             <a:fld id="{7A14F398-E279-4563-97D7-CD45B0F01439}" type="datetimeFigureOut">
               <a:rPr lang="zh-CN" altLang="en-US" smtClean="0"/>
               <a:pPr/>
-              <a:t>2020/6/2</a:t>
+              <a:t>2020/6/3</a:t>
             </a:fld>
             <a:endParaRPr lang="zh-CN" altLang="en-US" dirty="0"/>
           </a:p>
@@ -1213,7 +1213,7 @@
             <a:fld id="{2702115E-07FC-47AE-8678-8B681C689199}" type="datetimeFigureOut">
               <a:rPr lang="zh-CN" altLang="en-US" smtClean="0"/>
               <a:pPr/>
-              <a:t>2020/6/2</a:t>
+              <a:t>2020/6/3</a:t>
             </a:fld>
             <a:endParaRPr lang="zh-CN" altLang="en-US"/>
           </a:p>
@@ -1405,7 +1405,7 @@
             <a:fld id="{2702115E-07FC-47AE-8678-8B681C689199}" type="datetimeFigureOut">
               <a:rPr lang="zh-CN" altLang="en-US" smtClean="0"/>
               <a:pPr/>
-              <a:t>2020/6/2</a:t>
+              <a:t>2020/6/3</a:t>
             </a:fld>
             <a:endParaRPr lang="zh-CN" altLang="en-US"/>
           </a:p>
@@ -1740,7 +1740,7 @@
             <a:fld id="{2702115E-07FC-47AE-8678-8B681C689199}" type="datetimeFigureOut">
               <a:rPr lang="zh-CN" altLang="en-US" smtClean="0"/>
               <a:pPr/>
-              <a:t>2020/6/2</a:t>
+              <a:t>2020/6/3</a:t>
             </a:fld>
             <a:endParaRPr lang="zh-CN" altLang="en-US"/>
           </a:p>
@@ -1997,7 +1997,7 @@
             <a:fld id="{2702115E-07FC-47AE-8678-8B681C689199}" type="datetimeFigureOut">
               <a:rPr lang="zh-CN" altLang="en-US" smtClean="0"/>
               <a:pPr/>
-              <a:t>2020/6/2</a:t>
+              <a:t>2020/6/3</a:t>
             </a:fld>
             <a:endParaRPr lang="zh-CN" altLang="en-US"/>
           </a:p>
@@ -2179,7 +2179,7 @@
             <a:fld id="{2702115E-07FC-47AE-8678-8B681C689199}" type="datetimeFigureOut">
               <a:rPr lang="zh-CN" altLang="en-US" smtClean="0"/>
               <a:pPr/>
-              <a:t>2020/6/2</a:t>
+              <a:t>2020/6/3</a:t>
             </a:fld>
             <a:endParaRPr lang="zh-CN" altLang="en-US"/>
           </a:p>
@@ -2366,7 +2366,7 @@
             <a:fld id="{2702115E-07FC-47AE-8678-8B681C689199}" type="datetimeFigureOut">
               <a:rPr lang="zh-CN" altLang="en-US" smtClean="0"/>
               <a:pPr/>
-              <a:t>2020/6/2</a:t>
+              <a:t>2020/6/3</a:t>
             </a:fld>
             <a:endParaRPr lang="zh-CN" altLang="en-US"/>
           </a:p>
@@ -2713,7 +2713,7 @@
             <a:fld id="{2702115E-07FC-47AE-8678-8B681C689199}" type="datetimeFigureOut">
               <a:rPr lang="zh-CN" altLang="en-US" smtClean="0"/>
               <a:pPr/>
-              <a:t>2020/6/2</a:t>
+              <a:t>2020/6/3</a:t>
             </a:fld>
             <a:endParaRPr lang="zh-CN" altLang="en-US"/>
           </a:p>
@@ -3441,7 +3441,7 @@
             <a:fld id="{2702115E-07FC-47AE-8678-8B681C689199}" type="datetimeFigureOut">
               <a:rPr lang="zh-CN" altLang="en-US" smtClean="0"/>
               <a:pPr/>
-              <a:t>2020/6/2</a:t>
+              <a:t>2020/6/3</a:t>
             </a:fld>
             <a:endParaRPr lang="zh-CN" altLang="en-US"/>
           </a:p>
@@ -3740,7 +3740,7 @@
             <a:fld id="{2702115E-07FC-47AE-8678-8B681C689199}" type="datetimeFigureOut">
               <a:rPr lang="zh-CN" altLang="en-US" smtClean="0"/>
               <a:pPr/>
-              <a:t>2020/6/2</a:t>
+              <a:t>2020/6/3</a:t>
             </a:fld>
             <a:endParaRPr lang="zh-CN" altLang="en-US"/>
           </a:p>
@@ -4169,7 +4169,7 @@
             <a:fld id="{2702115E-07FC-47AE-8678-8B681C689199}" type="datetimeFigureOut">
               <a:rPr lang="zh-CN" altLang="en-US" smtClean="0"/>
               <a:pPr/>
-              <a:t>2020/6/2</a:t>
+              <a:t>2020/6/3</a:t>
             </a:fld>
             <a:endParaRPr lang="zh-CN" altLang="en-US"/>
           </a:p>
@@ -4300,7 +4300,7 @@
             <a:fld id="{2702115E-07FC-47AE-8678-8B681C689199}" type="datetimeFigureOut">
               <a:rPr lang="zh-CN" altLang="en-US" smtClean="0"/>
               <a:pPr/>
-              <a:t>2020/6/2</a:t>
+              <a:t>2020/6/3</a:t>
             </a:fld>
             <a:endParaRPr lang="zh-CN" altLang="en-US"/>
           </a:p>
@@ -4492,7 +4492,7 @@
             <a:fld id="{2702115E-07FC-47AE-8678-8B681C689199}" type="datetimeFigureOut">
               <a:rPr lang="zh-CN" altLang="en-US" smtClean="0"/>
               <a:pPr/>
-              <a:t>2020/6/2</a:t>
+              <a:t>2020/6/3</a:t>
             </a:fld>
             <a:endParaRPr lang="zh-CN" altLang="en-US"/>
           </a:p>
@@ -4739,7 +4739,7 @@
             <a:fld id="{2702115E-07FC-47AE-8678-8B681C689199}" type="datetimeFigureOut">
               <a:rPr lang="zh-CN" altLang="en-US" smtClean="0"/>
               <a:pPr/>
-              <a:t>2020/6/2</a:t>
+              <a:t>2020/6/3</a:t>
             </a:fld>
             <a:endParaRPr lang="zh-CN" altLang="en-US"/>
           </a:p>
@@ -4986,7 +4986,7 @@
             <a:fld id="{2702115E-07FC-47AE-8678-8B681C689199}" type="datetimeFigureOut">
               <a:rPr lang="zh-CN" altLang="en-US" smtClean="0"/>
               <a:pPr/>
-              <a:t>2020/6/2</a:t>
+              <a:t>2020/6/3</a:t>
             </a:fld>
             <a:endParaRPr lang="zh-CN" altLang="en-US"/>
           </a:p>
@@ -5221,7 +5221,7 @@
             <a:fld id="{2702115E-07FC-47AE-8678-8B681C689199}" type="datetimeFigureOut">
               <a:rPr lang="zh-CN" altLang="en-US" smtClean="0"/>
               <a:pPr/>
-              <a:t>2020/6/2</a:t>
+              <a:t>2020/6/3</a:t>
             </a:fld>
             <a:endParaRPr lang="zh-CN" altLang="en-US" dirty="0"/>
           </a:p>
@@ -9908,6 +9908,36 @@
           </a:p>
         </p:txBody>
       </p:sp>
+      <p:pic>
+        <p:nvPicPr>
+          <p:cNvPr id="3" name="圖片 2">
+            <a:extLst>
+              <a:ext uri="{FF2B5EF4-FFF2-40B4-BE49-F238E27FC236}">
+                <a16:creationId xmlns:a16="http://schemas.microsoft.com/office/drawing/2014/main" id="{60DB5A82-DEA2-4B29-999F-ABE4B966A721}"/>
+              </a:ext>
+            </a:extLst>
+          </p:cNvPr>
+          <p:cNvPicPr>
+            <a:picLocks noChangeAspect="1"/>
+          </p:cNvPicPr>
+          <p:nvPr/>
+        </p:nvPicPr>
+        <p:blipFill>
+          <a:blip r:embed="rId7"/>
+          <a:stretch>
+            <a:fillRect/>
+          </a:stretch>
+        </p:blipFill>
+        <p:spPr>
+          <a:xfrm>
+            <a:off x="2375756" y="3508648"/>
+            <a:ext cx="2065774" cy="1097134"/>
+          </a:xfrm>
+          <a:prstGeom prst="rect">
+            <a:avLst/>
+          </a:prstGeom>
+        </p:spPr>
+      </p:pic>
     </p:spTree>
     <p:extLst>
       <p:ext uri="{BB962C8B-B14F-4D97-AF65-F5344CB8AC3E}">
@@ -14677,6 +14707,33 @@
                                   </p:childTnLst>
                                 </p:cTn>
                               </p:par>
+                              <p:par>
+                                <p:cTn id="23" presetID="1" presetClass="entr" presetSubtype="0" fill="hold" grpId="0" nodeType="withEffect">
+                                  <p:stCondLst>
+                                    <p:cond delay="0"/>
+                                  </p:stCondLst>
+                                  <p:childTnLst>
+                                    <p:set>
+                                      <p:cBhvr>
+                                        <p:cTn id="24" dur="1" fill="hold">
+                                          <p:stCondLst>
+                                            <p:cond delay="0"/>
+                                          </p:stCondLst>
+                                        </p:cTn>
+                                        <p:tgtEl>
+                                          <p:spTgt spid="10"/>
+                                        </p:tgtEl>
+                                        <p:attrNameLst>
+                                          <p:attrName>style.visibility</p:attrName>
+                                        </p:attrNameLst>
+                                      </p:cBhvr>
+                                      <p:to>
+                                        <p:strVal val="visible"/>
+                                      </p:to>
+                                    </p:set>
+                                  </p:childTnLst>
+                                </p:cTn>
+                              </p:par>
                             </p:childTnLst>
                           </p:cTn>
                         </p:par>
@@ -14707,6 +14764,7 @@
     <p:bldLst>
       <p:bldP spid="6" grpId="0" animBg="1"/>
       <p:bldP spid="30" grpId="0"/>
+      <p:bldP spid="10" grpId="0" animBg="1"/>
     </p:bldLst>
   </p:timing>
 </p:sld>
@@ -18777,7 +18835,7 @@
                 <a:latin typeface="微软雅黑" pitchFamily="34" charset="-122"/>
                 <a:ea typeface="微软雅黑" pitchFamily="34" charset="-122"/>
               </a:rPr>
-              <a:t>Model2</a:t>
+              <a:t>model2</a:t>
             </a:r>
           </a:p>
         </p:txBody>
